--- a/assets/pptx/catalog-697.pptx
+++ b/assets/pptx/catalog-697.pptx
@@ -3271,7 +3271,7 @@
                 <a:ea typeface="Ebrima"/>
                 <a:cs typeface="Ebrima"/>
               </a:rPr>
-              <a:t>የጠላቴን ትጥቅ አቤት ሲያስፈታ (3x)</a:t>
+              <a:t>የጠላቴን ትጥቅ አቤት ሲያስፈታ 3x</a:t>
             </a:r>
           </a:p>
           <a:p>
@@ -3307,7 +3307,7 @@
                 <a:ea typeface="Ebrima"/>
                 <a:cs typeface="Ebrima"/>
               </a:rPr>
-              <a:t>የእኔ እኮ ጌታ ለየት ያለ ነው ለየት ያለ ነው (2x)</a:t>
+              <a:t>የእኔ እኮ ጌታ ለየት ያለ ነው ለየት ያለ ነው 2x</a:t>
             </a:r>
           </a:p>
         </p:txBody>
@@ -3428,7 +3428,7 @@
                 <a:ea typeface="Ebrima"/>
                 <a:cs typeface="Ebrima"/>
               </a:rPr>
-              <a:t>የማዳን እጁ ለእኔ ቀርቧል (2x)</a:t>
+              <a:t>የማዳን እጁ ለእኔ ቀርቧል 2x</a:t>
             </a:r>
           </a:p>
           <a:p>
@@ -3464,7 +3464,7 @@
                 <a:ea typeface="Ebrima"/>
                 <a:cs typeface="Ebrima"/>
               </a:rPr>
-              <a:t>የማዳን እጁ ለእኔ ቀርቧል (2x)</a:t>
+              <a:t>የማዳን እጁ ለእኔ ቀርቧል 2x</a:t>
             </a:r>
           </a:p>
         </p:txBody>
@@ -3549,7 +3549,7 @@
                 <a:ea typeface="Ebrima"/>
                 <a:cs typeface="Ebrima"/>
               </a:rPr>
-              <a:t>የታመንኩበት ጌታዬ ተዐምረኛ ነው (2x)</a:t>
+              <a:t>የታመንኩበት ጌታዬ ተዐምረኛ ነው 2x</a:t>
             </a:r>
           </a:p>
         </p:txBody>
@@ -3616,7 +3616,7 @@
                 <a:ea typeface="Ebrima"/>
                 <a:cs typeface="Ebrima"/>
               </a:rPr>
-              <a:t>አሁን አሁንማ ብሷል አሁን አሁን (2x)</a:t>
+              <a:t>አሁን አሁንማ ብሷል አሁን አሁን 2x</a:t>
             </a:r>
           </a:p>
           <a:p>
@@ -3652,7 +3652,7 @@
                 <a:ea typeface="Ebrima"/>
                 <a:cs typeface="Ebrima"/>
               </a:rPr>
-              <a:t>ከተዐምራቱ እኔን ያጠግበኛል (2x)</a:t>
+              <a:t>ከተዐምራቱ እኔን ያጠግበኛል 2x</a:t>
             </a:r>
           </a:p>
           <a:p>
@@ -3688,7 +3688,7 @@
                 <a:ea typeface="Ebrima"/>
                 <a:cs typeface="Ebrima"/>
               </a:rPr>
-              <a:t>ከተዐምራቱ እኔን ያጠግበኛል (2x)</a:t>
+              <a:t>ከተዐምራቱ እኔን ያጠግበኛል 2x</a:t>
             </a:r>
           </a:p>
         </p:txBody>
@@ -3773,7 +3773,7 @@
                 <a:ea typeface="Ebrima"/>
                 <a:cs typeface="Ebrima"/>
               </a:rPr>
-              <a:t>የጠላቴን ትጥቅ አቤት ሲያስፈታ (3x)</a:t>
+              <a:t>የጠላቴን ትጥቅ አቤት ሲያስፈታ 3x</a:t>
             </a:r>
           </a:p>
           <a:p>
@@ -3809,7 +3809,7 @@
                 <a:ea typeface="Ebrima"/>
                 <a:cs typeface="Ebrima"/>
               </a:rPr>
-              <a:t>የእኔ እኮ ጌታ ለየት ያለ ነው (2x)</a:t>
+              <a:t>የእኔ እኮ ጌታ ለየት ያለ ነው 2x</a:t>
             </a:r>
           </a:p>
         </p:txBody>
@@ -3894,7 +3894,7 @@
                 <a:ea typeface="Ebrima"/>
                 <a:cs typeface="Ebrima"/>
               </a:rPr>
-              <a:t>ኧረ እንዴት ተከፈተ አሁን በጊዜው (2x)</a:t>
+              <a:t>ኧረ እንዴት ተከፈተ አሁን በጊዜው 2x</a:t>
             </a:r>
           </a:p>
         </p:txBody>
@@ -3979,7 +3979,7 @@
                 <a:ea typeface="Ebrima"/>
                 <a:cs typeface="Ebrima"/>
               </a:rPr>
-              <a:t>ለመከፈት መነካት አላስፈለገው (2x)</a:t>
+              <a:t>ለመከፈት መነካት አላስፈለገው 2x</a:t>
             </a:r>
           </a:p>
         </p:txBody>
@@ -4185,7 +4185,7 @@
                 <a:ea typeface="Ebrima"/>
                 <a:cs typeface="Ebrima"/>
               </a:rPr>
-              <a:t>ጌታዬ እግዚአብሔር አለ (2x)</a:t>
+              <a:t>ጌታዬ እግዚአብሔር አለ 2x</a:t>
             </a:r>
           </a:p>
           <a:p>
@@ -4342,7 +4342,7 @@
                 <a:ea typeface="Ebrima"/>
                 <a:cs typeface="Ebrima"/>
               </a:rPr>
-              <a:t>በእኔ ያለው እርሱ ፍፁም አይደክምም (2x)</a:t>
+              <a:t>በእኔ ያለው እርሱ ፍፁም አይደክምም 2x</a:t>
             </a:r>
           </a:p>
         </p:txBody>
@@ -4427,7 +4427,7 @@
                 <a:ea typeface="Ebrima"/>
                 <a:cs typeface="Ebrima"/>
               </a:rPr>
-              <a:t>በመንፈሱ በእግዚአብሔር ችላለሁ ሁሉን (2x)</a:t>
+              <a:t>በመንፈሱ በእግዚአብሔር ችላለሁ ሁሉን 2x</a:t>
             </a:r>
           </a:p>
         </p:txBody>
@@ -4512,7 +4512,7 @@
                 <a:ea typeface="Ebrima"/>
                 <a:cs typeface="Ebrima"/>
               </a:rPr>
-              <a:t>በትከሻው መሃል ላይ በክብር አድራለሁ (2x)</a:t>
+              <a:t>በትከሻው መሃል ላይ በክብር አድራለሁ 2x</a:t>
             </a:r>
           </a:p>
         </p:txBody>
@@ -4597,7 +4597,7 @@
                 <a:ea typeface="Ebrima"/>
                 <a:cs typeface="Ebrima"/>
               </a:rPr>
-              <a:t>ጌታዬ እግዚአብሔር አለ (2x)</a:t>
+              <a:t>ጌታዬ እግዚአብሔር አለ 2x</a:t>
             </a:r>
           </a:p>
           <a:p>
